--- a/tex/ethicsreview/ethics_review_visibility/別紙3研究体制図.pptx
+++ b/tex/ethicsreview/ethics_review_visibility/別紙3研究体制図.pptx
@@ -104,6 +104,11 @@
       </a:defRPr>
     </a:lvl9pPr>
   </p:defaultTextStyle>
+  <p:extLst>
+    <p:ext uri="{EFAFB233-063F-42B5-8137-9DF3F51BA10A}">
+      <p15:sldGuideLst xmlns:p15="http://schemas.microsoft.com/office/powerpoint/2012/main"/>
+    </p:ext>
+  </p:extLst>
 </p:presentation>
 </file>
 
@@ -254,7 +259,7 @@
           <a:p>
             <a:fld id="{B8DF1395-FA99-4447-94F8-1375B56893CE}" type="datetimeFigureOut">
               <a:rPr kumimoji="1" lang="ja-JP" altLang="en-US" smtClean="0"/>
-              <a:t>2026/5/30</a:t>
+              <a:t>2026/6/15</a:t>
             </a:fld>
             <a:endParaRPr kumimoji="1" lang="ja-JP" altLang="en-US"/>
           </a:p>
@@ -484,7 +489,7 @@
           <a:p>
             <a:fld id="{B8DF1395-FA99-4447-94F8-1375B56893CE}" type="datetimeFigureOut">
               <a:rPr kumimoji="1" lang="ja-JP" altLang="en-US" smtClean="0"/>
-              <a:t>2026/5/30</a:t>
+              <a:t>2026/6/15</a:t>
             </a:fld>
             <a:endParaRPr kumimoji="1" lang="ja-JP" altLang="en-US"/>
           </a:p>
@@ -724,7 +729,7 @@
           <a:p>
             <a:fld id="{B8DF1395-FA99-4447-94F8-1375B56893CE}" type="datetimeFigureOut">
               <a:rPr kumimoji="1" lang="ja-JP" altLang="en-US" smtClean="0"/>
-              <a:t>2026/5/30</a:t>
+              <a:t>2026/6/15</a:t>
             </a:fld>
             <a:endParaRPr kumimoji="1" lang="ja-JP" altLang="en-US"/>
           </a:p>
@@ -954,7 +959,7 @@
           <a:p>
             <a:fld id="{B8DF1395-FA99-4447-94F8-1375B56893CE}" type="datetimeFigureOut">
               <a:rPr kumimoji="1" lang="ja-JP" altLang="en-US" smtClean="0"/>
-              <a:t>2026/5/30</a:t>
+              <a:t>2026/6/15</a:t>
             </a:fld>
             <a:endParaRPr kumimoji="1" lang="ja-JP" altLang="en-US"/>
           </a:p>
@@ -1229,7 +1234,7 @@
           <a:p>
             <a:fld id="{B8DF1395-FA99-4447-94F8-1375B56893CE}" type="datetimeFigureOut">
               <a:rPr kumimoji="1" lang="ja-JP" altLang="en-US" smtClean="0"/>
-              <a:t>2026/5/30</a:t>
+              <a:t>2026/6/15</a:t>
             </a:fld>
             <a:endParaRPr kumimoji="1" lang="ja-JP" altLang="en-US"/>
           </a:p>
@@ -1558,7 +1563,7 @@
           <a:p>
             <a:fld id="{B8DF1395-FA99-4447-94F8-1375B56893CE}" type="datetimeFigureOut">
               <a:rPr kumimoji="1" lang="ja-JP" altLang="en-US" smtClean="0"/>
-              <a:t>2026/5/30</a:t>
+              <a:t>2026/6/15</a:t>
             </a:fld>
             <a:endParaRPr kumimoji="1" lang="ja-JP" altLang="en-US"/>
           </a:p>
@@ -2034,7 +2039,7 @@
           <a:p>
             <a:fld id="{B8DF1395-FA99-4447-94F8-1375B56893CE}" type="datetimeFigureOut">
               <a:rPr kumimoji="1" lang="ja-JP" altLang="en-US" smtClean="0"/>
-              <a:t>2026/5/30</a:t>
+              <a:t>2026/6/15</a:t>
             </a:fld>
             <a:endParaRPr kumimoji="1" lang="ja-JP" altLang="en-US"/>
           </a:p>
@@ -2175,7 +2180,7 @@
           <a:p>
             <a:fld id="{B8DF1395-FA99-4447-94F8-1375B56893CE}" type="datetimeFigureOut">
               <a:rPr kumimoji="1" lang="ja-JP" altLang="en-US" smtClean="0"/>
-              <a:t>2026/5/30</a:t>
+              <a:t>2026/6/15</a:t>
             </a:fld>
             <a:endParaRPr kumimoji="1" lang="ja-JP" altLang="en-US"/>
           </a:p>
@@ -2288,7 +2293,7 @@
           <a:p>
             <a:fld id="{B8DF1395-FA99-4447-94F8-1375B56893CE}" type="datetimeFigureOut">
               <a:rPr kumimoji="1" lang="ja-JP" altLang="en-US" smtClean="0"/>
-              <a:t>2026/5/30</a:t>
+              <a:t>2026/6/15</a:t>
             </a:fld>
             <a:endParaRPr kumimoji="1" lang="ja-JP" altLang="en-US"/>
           </a:p>
@@ -2631,7 +2636,7 @@
           <a:p>
             <a:fld id="{B8DF1395-FA99-4447-94F8-1375B56893CE}" type="datetimeFigureOut">
               <a:rPr kumimoji="1" lang="ja-JP" altLang="en-US" smtClean="0"/>
-              <a:t>2026/5/30</a:t>
+              <a:t>2026/6/15</a:t>
             </a:fld>
             <a:endParaRPr kumimoji="1" lang="ja-JP" altLang="en-US"/>
           </a:p>
@@ -2919,7 +2924,7 @@
           <a:p>
             <a:fld id="{B8DF1395-FA99-4447-94F8-1375B56893CE}" type="datetimeFigureOut">
               <a:rPr kumimoji="1" lang="ja-JP" altLang="en-US" smtClean="0"/>
-              <a:t>2026/5/30</a:t>
+              <a:t>2026/6/15</a:t>
             </a:fld>
             <a:endParaRPr kumimoji="1" lang="ja-JP" altLang="en-US"/>
           </a:p>
@@ -3192,7 +3197,7 @@
           <a:p>
             <a:fld id="{B8DF1395-FA99-4447-94F8-1375B56893CE}" type="datetimeFigureOut">
               <a:rPr kumimoji="1" lang="ja-JP" altLang="en-US" smtClean="0"/>
-              <a:t>2026/5/30</a:t>
+              <a:t>2026/6/15</a:t>
             </a:fld>
             <a:endParaRPr kumimoji="1" lang="ja-JP" altLang="en-US"/>
           </a:p>
@@ -3761,17 +3766,11 @@
             <a:avLst/>
           </a:prstGeom>
           <a:solidFill>
-            <a:schemeClr val="accent1">
-              <a:lumMod val="60000"/>
-              <a:lumOff val="40000"/>
-            </a:schemeClr>
+            <a:schemeClr val="tx2"/>
           </a:solidFill>
           <a:ln>
             <a:solidFill>
-              <a:schemeClr val="accent1">
-                <a:lumMod val="60000"/>
-                <a:lumOff val="40000"/>
-              </a:schemeClr>
+              <a:schemeClr val="tx2"/>
             </a:solidFill>
           </a:ln>
         </p:spPr>
@@ -3798,7 +3797,14 @@
             <a:pPr algn="ctr"/>
             <a:r>
               <a:rPr lang="ja-JP" altLang="ja-JP" dirty="0"/>
-              <a:t>個々の結果が分からないようにした全体の解析結果のみを共有する</a:t>
+              <a:t>個々の結果が分からないようにした全体の</a:t>
+            </a:r>
+            <a:br>
+              <a:rPr lang="en-US" altLang="ja-JP" dirty="0"/>
+            </a:br>
+            <a:r>
+              <a:rPr lang="ja-JP" altLang="ja-JP" dirty="0"/>
+              <a:t>解析結果のみを共有する</a:t>
             </a:r>
             <a:endParaRPr kumimoji="1" lang="ja-JP" altLang="en-US" dirty="0"/>
           </a:p>
@@ -3891,36 +3897,36 @@
 <file path=ppt/theme/theme1.xml><?xml version="1.0" encoding="utf-8"?>
 <a:theme xmlns:a="http://schemas.openxmlformats.org/drawingml/2006/main" name="Office テーマ">
   <a:themeElements>
-    <a:clrScheme name="Office">
+    <a:clrScheme name="UT">
       <a:dk1>
-        <a:sysClr val="windowText" lastClr="000000"/>
+        <a:srgbClr val="474A4D"/>
       </a:dk1>
       <a:lt1>
-        <a:sysClr val="window" lastClr="FFFFFF"/>
+        <a:srgbClr val="F6F7F8"/>
       </a:lt1>
       <a:dk2>
-        <a:srgbClr val="0E2841"/>
+        <a:srgbClr val="1A4472"/>
       </a:dk2>
       <a:lt2>
-        <a:srgbClr val="E8E8E8"/>
+        <a:srgbClr val="FCFAF2"/>
       </a:lt2>
       <a:accent1>
-        <a:srgbClr val="156082"/>
+        <a:srgbClr val="264892"/>
       </a:accent1>
       <a:accent2>
-        <a:srgbClr val="E97132"/>
+        <a:srgbClr val="FFCD00"/>
       </a:accent2>
       <a:accent3>
-        <a:srgbClr val="196B24"/>
+        <a:srgbClr val="192E60"/>
       </a:accent3>
       <a:accent4>
-        <a:srgbClr val="0F9ED5"/>
+        <a:srgbClr val="B6C7EC"/>
       </a:accent4>
       <a:accent5>
-        <a:srgbClr val="A02B93"/>
+        <a:srgbClr val="C08FB3"/>
       </a:accent5>
       <a:accent6>
-        <a:srgbClr val="4EA72E"/>
+        <a:srgbClr val="86B81B"/>
       </a:accent6>
       <a:hlink>
         <a:srgbClr val="467886"/>
